--- a/data/reference/dividers/divider3_source.pptx
+++ b/data/reference/dividers/divider3_source.pptx
@@ -104,6 +104,11 @@
       </a:defRPr>
     </a:lvl9pPr>
   </p:defaultTextStyle>
+  <p:extLst>
+    <p:ext uri="{EFAFB233-063F-42B5-8137-9DF3F51BA10A}">
+      <p15:sldGuideLst xmlns:p15="http://schemas.microsoft.com/office/powerpoint/2012/main"/>
+    </p:ext>
+  </p:extLst>
 </p:presentation>
 </file>
 
@@ -256,7 +261,7 @@
           <a:p>
             <a:fld id="{901126DA-A927-D942-8455-2B8502BE31C5}" type="datetimeFigureOut">
               <a:rPr lang="en-KR" smtClean="0"/>
-              <a:t>8/15/26</a:t>
+              <a:t>8/17/26</a:t>
             </a:fld>
             <a:endParaRPr lang="en-KR"/>
           </a:p>
@@ -456,7 +461,7 @@
           <a:p>
             <a:fld id="{901126DA-A927-D942-8455-2B8502BE31C5}" type="datetimeFigureOut">
               <a:rPr lang="en-KR" smtClean="0"/>
-              <a:t>8/15/26</a:t>
+              <a:t>8/17/26</a:t>
             </a:fld>
             <a:endParaRPr lang="en-KR"/>
           </a:p>
@@ -666,7 +671,7 @@
           <a:p>
             <a:fld id="{901126DA-A927-D942-8455-2B8502BE31C5}" type="datetimeFigureOut">
               <a:rPr lang="en-KR" smtClean="0"/>
-              <a:t>8/15/26</a:t>
+              <a:t>8/17/26</a:t>
             </a:fld>
             <a:endParaRPr lang="en-KR"/>
           </a:p>
@@ -866,7 +871,7 @@
           <a:p>
             <a:fld id="{901126DA-A927-D942-8455-2B8502BE31C5}" type="datetimeFigureOut">
               <a:rPr lang="en-KR" smtClean="0"/>
-              <a:t>8/15/26</a:t>
+              <a:t>8/17/26</a:t>
             </a:fld>
             <a:endParaRPr lang="en-KR"/>
           </a:p>
@@ -1142,7 +1147,7 @@
           <a:p>
             <a:fld id="{901126DA-A927-D942-8455-2B8502BE31C5}" type="datetimeFigureOut">
               <a:rPr lang="en-KR" smtClean="0"/>
-              <a:t>8/15/26</a:t>
+              <a:t>8/17/26</a:t>
             </a:fld>
             <a:endParaRPr lang="en-KR"/>
           </a:p>
@@ -1410,7 +1415,7 @@
           <a:p>
             <a:fld id="{901126DA-A927-D942-8455-2B8502BE31C5}" type="datetimeFigureOut">
               <a:rPr lang="en-KR" smtClean="0"/>
-              <a:t>8/15/26</a:t>
+              <a:t>8/17/26</a:t>
             </a:fld>
             <a:endParaRPr lang="en-KR"/>
           </a:p>
@@ -1825,7 +1830,7 @@
           <a:p>
             <a:fld id="{901126DA-A927-D942-8455-2B8502BE31C5}" type="datetimeFigureOut">
               <a:rPr lang="en-KR" smtClean="0"/>
-              <a:t>8/15/26</a:t>
+              <a:t>8/17/26</a:t>
             </a:fld>
             <a:endParaRPr lang="en-KR"/>
           </a:p>
@@ -1967,7 +1972,7 @@
           <a:p>
             <a:fld id="{901126DA-A927-D942-8455-2B8502BE31C5}" type="datetimeFigureOut">
               <a:rPr lang="en-KR" smtClean="0"/>
-              <a:t>8/15/26</a:t>
+              <a:t>8/17/26</a:t>
             </a:fld>
             <a:endParaRPr lang="en-KR"/>
           </a:p>
@@ -2080,7 +2085,7 @@
           <a:p>
             <a:fld id="{901126DA-A927-D942-8455-2B8502BE31C5}" type="datetimeFigureOut">
               <a:rPr lang="en-KR" smtClean="0"/>
-              <a:t>8/15/26</a:t>
+              <a:t>8/17/26</a:t>
             </a:fld>
             <a:endParaRPr lang="en-KR"/>
           </a:p>
@@ -2393,7 +2398,7 @@
           <a:p>
             <a:fld id="{901126DA-A927-D942-8455-2B8502BE31C5}" type="datetimeFigureOut">
               <a:rPr lang="en-KR" smtClean="0"/>
-              <a:t>8/15/26</a:t>
+              <a:t>8/17/26</a:t>
             </a:fld>
             <a:endParaRPr lang="en-KR"/>
           </a:p>
@@ -2682,7 +2687,7 @@
           <a:p>
             <a:fld id="{901126DA-A927-D942-8455-2B8502BE31C5}" type="datetimeFigureOut">
               <a:rPr lang="en-KR" smtClean="0"/>
-              <a:t>8/15/26</a:t>
+              <a:t>8/17/26</a:t>
             </a:fld>
             <a:endParaRPr lang="en-KR"/>
           </a:p>
@@ -2925,7 +2930,7 @@
           <a:p>
             <a:fld id="{901126DA-A927-D942-8455-2B8502BE31C5}" type="datetimeFigureOut">
               <a:rPr lang="en-KR" smtClean="0"/>
-              <a:t>8/15/26</a:t>
+              <a:t>8/17/26</a:t>
             </a:fld>
             <a:endParaRPr lang="en-KR"/>
           </a:p>
@@ -3375,16 +3380,12 @@
             </a:avLst>
           </a:prstGeom>
           <a:solidFill>
-            <a:srgbClr val="2D6A3E">
-              <a:alpha val="44706"/>
-            </a:srgbClr>
+            <a:schemeClr val="tx1">
+              <a:alpha val="30000"/>
+            </a:schemeClr>
           </a:solidFill>
           <a:ln w="14299" cap="sq">
-            <a:solidFill>
-              <a:srgbClr val="749D80">
-                <a:alpha val="44706"/>
-              </a:srgbClr>
-            </a:solidFill>
+            <a:noFill/>
           </a:ln>
         </p:spPr>
         <p:style>
@@ -3480,8 +3481,8 @@
         </p:nvSpPr>
         <p:spPr>
           <a:xfrm>
-            <a:off x="880900" y="4581104"/>
-            <a:ext cx="4392777" cy="425501"/>
+            <a:off x="1106368" y="4196575"/>
+            <a:ext cx="4392777" cy="468051"/>
           </a:xfrm>
           <a:prstGeom prst="rect">
             <a:avLst/>
@@ -3524,7 +3525,7 @@
         </p:nvSpPr>
         <p:spPr>
           <a:xfrm>
-            <a:off x="343592" y="5006605"/>
+            <a:off x="493904" y="4555669"/>
             <a:ext cx="5586153" cy="704697"/>
           </a:xfrm>
           <a:prstGeom prst="rect">
@@ -3564,8 +3565,8 @@
         </p:nvSpPr>
         <p:spPr>
           <a:xfrm>
-            <a:off x="685301" y="3496099"/>
-            <a:ext cx="5153227" cy="579120"/>
+            <a:off x="772983" y="3316831"/>
+            <a:ext cx="5153227" cy="637032"/>
           </a:xfrm>
           <a:prstGeom prst="rect">
             <a:avLst/>
@@ -3646,7 +3647,7 @@
               </a:defRPr>
             </a:pPr>
             <a:r>
-              <a:rPr sz="2600"/>
+              <a:rPr sz="2600" dirty="0"/>
               <a:t>“O woman, great is your faith!”</a:t>
             </a:r>
           </a:p>
@@ -3661,7 +3662,7 @@
         <p:spPr>
           <a:xfrm>
             <a:off x="7183083" y="3867912"/>
-            <a:ext cx="3879494" cy="498117"/>
+            <a:ext cx="3879494" cy="713192"/>
           </a:xfrm>
           <a:prstGeom prst="rect">
             <a:avLst/>
@@ -3718,7 +3719,7 @@
         </p:nvSpPr>
         <p:spPr>
           <a:xfrm>
-            <a:off x="186204" y="1593494"/>
+            <a:off x="48418" y="1380552"/>
             <a:ext cx="6526046" cy="1985163"/>
           </a:xfrm>
           <a:prstGeom prst="rect">
@@ -3773,6 +3774,103 @@
               <a:rPr sz="5867" dirty="0"/>
               <a:t>Ordinary Time</a:t>
             </a:r>
+          </a:p>
+        </p:txBody>
+      </p:sp>
+      <p:sp>
+        <p:nvSpPr>
+          <p:cNvPr id="10" name="TextBox 9">
+            <a:extLst>
+              <a:ext uri="{FF2B5EF4-FFF2-40B4-BE49-F238E27FC236}">
+                <a16:creationId xmlns:a16="http://schemas.microsoft.com/office/drawing/2014/main" id="{CFEC6BEA-DD70-F610-3A2B-1557989E7AF7}"/>
+              </a:ext>
+            </a:extLst>
+          </p:cNvPr>
+          <p:cNvSpPr txBox="1"/>
+          <p:nvPr/>
+        </p:nvSpPr>
+        <p:spPr>
+          <a:xfrm>
+            <a:off x="965331" y="5389775"/>
+            <a:ext cx="4392777" cy="468051"/>
+          </a:xfrm>
+          <a:prstGeom prst="rect">
+            <a:avLst/>
+          </a:prstGeom>
+          <a:noFill/>
+        </p:spPr>
+        <p:txBody>
+          <a:bodyPr wrap="square" lIns="73152" tIns="48768" rIns="73152" bIns="48768" anchor="ctr">
+            <a:noAutofit/>
+          </a:bodyPr>
+          <a:lstStyle/>
+          <a:p>
+            <a:pPr algn="ctr">
+              <a:lnSpc>
+                <a:spcPct val="108000"/>
+              </a:lnSpc>
+              <a:defRPr sz="3700" b="1" i="0" u="none">
+                <a:solidFill>
+                  <a:srgbClr val="FFEABF"/>
+                </a:solidFill>
+                <a:latin typeface="Arial"/>
+              </a:defRPr>
+            </a:pPr>
+            <a:r>
+              <a:rPr lang="en-US" sz="2133" dirty="0"/>
+              <a:t>CO - </a:t>
+            </a:r>
+            <a:r>
+              <a:rPr sz="2133" dirty="0"/>
+              <a:t>CELEBRANT:</a:t>
+            </a:r>
+          </a:p>
+        </p:txBody>
+      </p:sp>
+      <p:sp>
+        <p:nvSpPr>
+          <p:cNvPr id="11" name="TextBox 10">
+            <a:extLst>
+              <a:ext uri="{FF2B5EF4-FFF2-40B4-BE49-F238E27FC236}">
+                <a16:creationId xmlns:a16="http://schemas.microsoft.com/office/drawing/2014/main" id="{C1E61B48-DFBD-5CD2-AB6B-EFC167D2E883}"/>
+              </a:ext>
+            </a:extLst>
+          </p:cNvPr>
+          <p:cNvSpPr txBox="1"/>
+          <p:nvPr/>
+        </p:nvSpPr>
+        <p:spPr>
+          <a:xfrm>
+            <a:off x="429984" y="5720377"/>
+            <a:ext cx="5586153" cy="704697"/>
+          </a:xfrm>
+          <a:prstGeom prst="rect">
+            <a:avLst/>
+          </a:prstGeom>
+          <a:noFill/>
+        </p:spPr>
+        <p:txBody>
+          <a:bodyPr wrap="none" lIns="73152" tIns="48768" rIns="73152" bIns="48768" anchor="ctr">
+            <a:noAutofit/>
+          </a:bodyPr>
+          <a:lstStyle/>
+          <a:p>
+            <a:pPr algn="ctr">
+              <a:lnSpc>
+                <a:spcPct val="108000"/>
+              </a:lnSpc>
+              <a:defRPr sz="6100" b="1" i="0" u="none">
+                <a:solidFill>
+                  <a:srgbClr val="FAF8F4"/>
+                </a:solidFill>
+                <a:latin typeface="Arial"/>
+              </a:defRPr>
+            </a:pPr>
+            <a:r>
+              <a:rPr lang="en-US" sz="3500" dirty="0"/>
+              <a:t>Gabriel Divino</a:t>
+            </a:r>
+            <a:endParaRPr sz="3500" dirty="0"/>
           </a:p>
         </p:txBody>
       </p:sp>
